--- a/paper/slides/paper_figures.pptx
+++ b/paper/slides/paper_figures.pptx
@@ -4236,8 +4236,8 @@
         </p:blipFill>
         <p:spPr>
           <a:xfrm>
-            <a:off x="182880" y="1250072"/>
-            <a:ext cx="11825935" cy="5089375"/>
+            <a:off x="182880" y="920635"/>
+            <a:ext cx="11825935" cy="5748249"/>
           </a:xfrm>
           <a:prstGeom prst="rect">
             <a:avLst/>
@@ -4382,8 +4382,8 @@
         </p:blipFill>
         <p:spPr>
           <a:xfrm>
-            <a:off x="182880" y="1305400"/>
-            <a:ext cx="11825935" cy="4978718"/>
+            <a:off x="182880" y="1293574"/>
+            <a:ext cx="11825935" cy="5002370"/>
           </a:xfrm>
           <a:prstGeom prst="rect">
             <a:avLst/>
@@ -4455,8 +4455,8 @@
         </p:blipFill>
         <p:spPr>
           <a:xfrm>
-            <a:off x="2624815" y="868680"/>
-            <a:ext cx="6942064" cy="5852160"/>
+            <a:off x="2245742" y="868680"/>
+            <a:ext cx="7700210" cy="5852160"/>
           </a:xfrm>
           <a:prstGeom prst="rect">
             <a:avLst/>
@@ -4528,8 +4528,8 @@
         </p:blipFill>
         <p:spPr>
           <a:xfrm>
-            <a:off x="4019386" y="868680"/>
-            <a:ext cx="4152922" cy="5852160"/>
+            <a:off x="3068868" y="868680"/>
+            <a:ext cx="6053958" cy="5852160"/>
           </a:xfrm>
           <a:prstGeom prst="rect">
             <a:avLst/>

--- a/paper/slides/paper_figures.pptx
+++ b/paper/slides/paper_figures.pptx
@@ -3871,8 +3871,8 @@
         </p:blipFill>
         <p:spPr>
           <a:xfrm>
-            <a:off x="1414119" y="868680"/>
-            <a:ext cx="9363456" cy="5852160"/>
+            <a:off x="1690995" y="868680"/>
+            <a:ext cx="8809703" cy="5852160"/>
           </a:xfrm>
           <a:prstGeom prst="rect">
             <a:avLst/>
@@ -4017,8 +4017,8 @@
         </p:blipFill>
         <p:spPr>
           <a:xfrm>
-            <a:off x="3686134" y="868680"/>
-            <a:ext cx="4819425" cy="5852160"/>
+            <a:off x="3567136" y="868680"/>
+            <a:ext cx="5057422" cy="5852160"/>
           </a:xfrm>
           <a:prstGeom prst="rect">
             <a:avLst/>

--- a/paper/slides/paper_figures.pptx
+++ b/paper/slides/paper_figures.pptx
@@ -26,7 +26,7 @@
     <p:sldId id="274" r:id="rId25"/>
     <p:sldId id="275" r:id="rId26"/>
   </p:sldIdLst>
-  <p:sldSz cx="12191695" cy="6858000" type="screen4x3"/>
+  <p:sldSz cx="9144000" cy="5143500" type="screen4x3"/>
   <p:notesSz cx="6858000" cy="9144000"/>
   <p:defaultTextStyle>
     <a:defPPr>
@@ -3175,8 +3175,8 @@
         </p:nvSpPr>
         <p:spPr>
           <a:xfrm>
-            <a:off x="182880" y="182880"/>
-            <a:ext cx="11825935" cy="640080"/>
+            <a:off x="182880" y="154305"/>
+            <a:ext cx="8778240" cy="617220"/>
           </a:xfrm>
           <a:prstGeom prst="rect">
             <a:avLst/>
@@ -3190,7 +3190,7 @@
           <a:lstStyle/>
           <a:p>
             <a:pPr>
-              <a:defRPr sz="2400" b="1"/>
+              <a:defRPr sz="1800" b="1"/>
             </a:pPr>
             <a:r>
               <a:t>Example selective units</a:t>
@@ -3214,8 +3214,8 @@
         </p:blipFill>
         <p:spPr>
           <a:xfrm>
-            <a:off x="1780095" y="868680"/>
-            <a:ext cx="8631504" cy="5852160"/>
+            <a:off x="1499555" y="822960"/>
+            <a:ext cx="6144889" cy="4166235"/>
           </a:xfrm>
           <a:prstGeom prst="rect">
             <a:avLst/>
@@ -3248,8 +3248,8 @@
         </p:nvSpPr>
         <p:spPr>
           <a:xfrm>
-            <a:off x="182880" y="182880"/>
-            <a:ext cx="11825935" cy="640080"/>
+            <a:off x="182880" y="154305"/>
+            <a:ext cx="8778240" cy="617220"/>
           </a:xfrm>
           <a:prstGeom prst="rect">
             <a:avLst/>
@@ -3263,7 +3263,7 @@
           <a:lstStyle/>
           <a:p>
             <a:pPr>
-              <a:defRPr sz="2400" b="1"/>
+              <a:defRPr sz="1800" b="1"/>
             </a:pPr>
             <a:r>
               <a:t>Linear decoding with word identity</a:t>
@@ -3287,8 +3287,8 @@
         </p:blipFill>
         <p:spPr>
           <a:xfrm>
-            <a:off x="182880" y="2109564"/>
-            <a:ext cx="11825935" cy="3370391"/>
+            <a:off x="182880" y="1655178"/>
+            <a:ext cx="8778240" cy="2501798"/>
           </a:xfrm>
           <a:prstGeom prst="rect">
             <a:avLst/>
@@ -3321,8 +3321,8 @@
         </p:nvSpPr>
         <p:spPr>
           <a:xfrm>
-            <a:off x="182880" y="182880"/>
-            <a:ext cx="11825935" cy="640080"/>
+            <a:off x="182880" y="154305"/>
+            <a:ext cx="8778240" cy="617220"/>
           </a:xfrm>
           <a:prstGeom prst="rect">
             <a:avLst/>
@@ -3336,7 +3336,7 @@
           <a:lstStyle/>
           <a:p>
             <a:pPr>
-              <a:defRPr sz="2400" b="1"/>
+              <a:defRPr sz="1800" b="1"/>
             </a:pPr>
             <a:r>
               <a:t>DFA states and trajectories across seeds</a:t>
@@ -3360,8 +3360,8 @@
         </p:blipFill>
         <p:spPr>
           <a:xfrm>
-            <a:off x="182880" y="1230010"/>
-            <a:ext cx="11825935" cy="5129499"/>
+            <a:off x="182880" y="1002296"/>
+            <a:ext cx="8778240" cy="3807561"/>
           </a:xfrm>
           <a:prstGeom prst="rect">
             <a:avLst/>
@@ -3394,8 +3394,8 @@
         </p:nvSpPr>
         <p:spPr>
           <a:xfrm>
-            <a:off x="182880" y="182880"/>
-            <a:ext cx="11825935" cy="640080"/>
+            <a:off x="182880" y="154305"/>
+            <a:ext cx="8778240" cy="617220"/>
           </a:xfrm>
           <a:prstGeom prst="rect">
             <a:avLst/>
@@ -3409,7 +3409,7 @@
           <a:lstStyle/>
           <a:p>
             <a:pPr>
-              <a:defRPr sz="2400" b="1"/>
+              <a:defRPr sz="1800" b="1"/>
             </a:pPr>
             <a:r>
               <a:t>Mixed-vocab scaling overview</a:t>
@@ -3433,8 +3433,8 @@
         </p:blipFill>
         <p:spPr>
           <a:xfrm>
-            <a:off x="182880" y="1767456"/>
-            <a:ext cx="11825935" cy="4054606"/>
+            <a:off x="182880" y="1401236"/>
+            <a:ext cx="8778240" cy="3009682"/>
           </a:xfrm>
           <a:prstGeom prst="rect">
             <a:avLst/>
@@ -3467,8 +3467,8 @@
         </p:nvSpPr>
         <p:spPr>
           <a:xfrm>
-            <a:off x="182880" y="182880"/>
-            <a:ext cx="11825935" cy="640080"/>
+            <a:off x="182880" y="154305"/>
+            <a:ext cx="8778240" cy="617220"/>
           </a:xfrm>
           <a:prstGeom prst="rect">
             <a:avLst/>
@@ -3482,7 +3482,7 @@
           <a:lstStyle/>
           <a:p>
             <a:pPr>
-              <a:defRPr sz="2400" b="1"/>
+              <a:defRPr sz="1800" b="1"/>
             </a:pPr>
             <a:r>
               <a:t>Activation heatmaps across DFA size</a:t>
@@ -3506,8 +3506,8 @@
         </p:blipFill>
         <p:spPr>
           <a:xfrm>
-            <a:off x="1810793" y="868680"/>
-            <a:ext cx="8570108" cy="5852160"/>
+            <a:off x="1521409" y="822960"/>
+            <a:ext cx="6101180" cy="4166235"/>
           </a:xfrm>
           <a:prstGeom prst="rect">
             <a:avLst/>
@@ -3540,8 +3540,8 @@
         </p:nvSpPr>
         <p:spPr>
           <a:xfrm>
-            <a:off x="182880" y="182880"/>
-            <a:ext cx="11825935" cy="640080"/>
+            <a:off x="182880" y="154305"/>
+            <a:ext cx="8778240" cy="617220"/>
           </a:xfrm>
           <a:prstGeom prst="rect">
             <a:avLst/>
@@ -3555,7 +3555,7 @@
           <a:lstStyle/>
           <a:p>
             <a:pPr>
-              <a:defRPr sz="2400" b="1"/>
+              <a:defRPr sz="1800" b="1"/>
             </a:pPr>
             <a:r>
               <a:t>Closed-loop trajectories by DFA span</a:t>
@@ -3579,8 +3579,8 @@
         </p:blipFill>
         <p:spPr>
           <a:xfrm>
-            <a:off x="3224976" y="868680"/>
-            <a:ext cx="5741741" cy="5852160"/>
+            <a:off x="2528186" y="822960"/>
+            <a:ext cx="4087626" cy="4166235"/>
           </a:xfrm>
           <a:prstGeom prst="rect">
             <a:avLst/>
@@ -3613,8 +3613,8 @@
         </p:nvSpPr>
         <p:spPr>
           <a:xfrm>
-            <a:off x="182880" y="182880"/>
-            <a:ext cx="11825935" cy="640080"/>
+            <a:off x="182880" y="154305"/>
+            <a:ext cx="8778240" cy="617220"/>
           </a:xfrm>
           <a:prstGeom prst="rect">
             <a:avLst/>
@@ -3628,7 +3628,7 @@
           <a:lstStyle/>
           <a:p>
             <a:pPr>
-              <a:defRPr sz="2400" b="1"/>
+              <a:defRPr sz="1800" b="1"/>
             </a:pPr>
             <a:r>
               <a:t>Readout curves and learning</a:t>
@@ -3652,8 +3652,8 @@
         </p:blipFill>
         <p:spPr>
           <a:xfrm>
-            <a:off x="3201412" y="868680"/>
-            <a:ext cx="5788870" cy="5852160"/>
+            <a:off x="2511410" y="822960"/>
+            <a:ext cx="4121178" cy="4166235"/>
           </a:xfrm>
           <a:prstGeom prst="rect">
             <a:avLst/>
@@ -3686,8 +3686,8 @@
         </p:nvSpPr>
         <p:spPr>
           <a:xfrm>
-            <a:off x="182880" y="182880"/>
-            <a:ext cx="11825935" cy="640080"/>
+            <a:off x="182880" y="154305"/>
+            <a:ext cx="8778240" cy="617220"/>
           </a:xfrm>
           <a:prstGeom prst="rect">
             <a:avLst/>
@@ -3701,7 +3701,7 @@
           <a:lstStyle/>
           <a:p>
             <a:pPr>
-              <a:defRPr sz="2400" b="1"/>
+              <a:defRPr sz="1800" b="1"/>
             </a:pPr>
             <a:r>
               <a:t>Within-feature geometry and unit selectivity</a:t>
@@ -3725,8 +3725,8 @@
         </p:blipFill>
         <p:spPr>
           <a:xfrm>
-            <a:off x="330172" y="868680"/>
-            <a:ext cx="11531349" cy="5852160"/>
+            <a:off x="467334" y="822960"/>
+            <a:ext cx="8209330" cy="4166235"/>
           </a:xfrm>
           <a:prstGeom prst="rect">
             <a:avLst/>
@@ -3759,8 +3759,8 @@
         </p:nvSpPr>
         <p:spPr>
           <a:xfrm>
-            <a:off x="182880" y="182880"/>
-            <a:ext cx="11825935" cy="640080"/>
+            <a:off x="182880" y="154305"/>
+            <a:ext cx="8778240" cy="617220"/>
           </a:xfrm>
           <a:prstGeom prst="rect">
             <a:avLst/>
@@ -3774,7 +3774,7 @@
           <a:lstStyle/>
           <a:p>
             <a:pPr>
-              <a:defRPr sz="2400" b="1"/>
+              <a:defRPr sz="1800" b="1"/>
             </a:pPr>
             <a:r>
               <a:t>Readout vs DFA at fixed PCs</a:t>
@@ -3798,8 +3798,8 @@
         </p:blipFill>
         <p:spPr>
           <a:xfrm>
-            <a:off x="423317" y="868680"/>
-            <a:ext cx="11345059" cy="5852160"/>
+            <a:off x="533646" y="822960"/>
+            <a:ext cx="8076707" cy="4166235"/>
           </a:xfrm>
           <a:prstGeom prst="rect">
             <a:avLst/>
@@ -3832,8 +3832,8 @@
         </p:nvSpPr>
         <p:spPr>
           <a:xfrm>
-            <a:off x="182880" y="182880"/>
-            <a:ext cx="11825935" cy="640080"/>
+            <a:off x="182880" y="154305"/>
+            <a:ext cx="8778240" cy="617220"/>
           </a:xfrm>
           <a:prstGeom prst="rect">
             <a:avLst/>
@@ -3847,7 +3847,7 @@
           <a:lstStyle/>
           <a:p>
             <a:pPr>
-              <a:defRPr sz="2400" b="1"/>
+              <a:defRPr sz="1800" b="1"/>
             </a:pPr>
             <a:r>
               <a:t>Weight matrices by DFA size</a:t>
@@ -3871,8 +3871,8 @@
         </p:blipFill>
         <p:spPr>
           <a:xfrm>
-            <a:off x="1690995" y="868680"/>
-            <a:ext cx="8809703" cy="5852160"/>
+            <a:off x="1436124" y="822960"/>
+            <a:ext cx="6271751" cy="4166234"/>
           </a:xfrm>
           <a:prstGeom prst="rect">
             <a:avLst/>
@@ -3905,8 +3905,8 @@
         </p:nvSpPr>
         <p:spPr>
           <a:xfrm>
-            <a:off x="182880" y="182880"/>
-            <a:ext cx="11825935" cy="640080"/>
+            <a:off x="182880" y="154305"/>
+            <a:ext cx="8778240" cy="617220"/>
           </a:xfrm>
           <a:prstGeom prst="rect">
             <a:avLst/>
@@ -3920,7 +3920,7 @@
           <a:lstStyle/>
           <a:p>
             <a:pPr>
-              <a:defRPr sz="2400" b="1"/>
+              <a:defRPr sz="1800" b="1"/>
             </a:pPr>
             <a:r>
               <a:t>Minimal DFAs for three small vocabularies</a:t>
@@ -3944,8 +3944,8 @@
         </p:blipFill>
         <p:spPr>
           <a:xfrm>
-            <a:off x="182880" y="946680"/>
-            <a:ext cx="11825935" cy="5696158"/>
+            <a:off x="247188" y="822960"/>
+            <a:ext cx="8649622" cy="4166235"/>
           </a:xfrm>
           <a:prstGeom prst="rect">
             <a:avLst/>
@@ -3978,8 +3978,8 @@
         </p:nvSpPr>
         <p:spPr>
           <a:xfrm>
-            <a:off x="182880" y="182880"/>
-            <a:ext cx="11825935" cy="640080"/>
+            <a:off x="182880" y="154305"/>
+            <a:ext cx="8778240" cy="617220"/>
           </a:xfrm>
           <a:prstGeom prst="rect">
             <a:avLst/>
@@ -3993,7 +3993,7 @@
           <a:lstStyle/>
           <a:p>
             <a:pPr>
-              <a:defRPr sz="2400" b="1"/>
+              <a:defRPr sz="1800" b="1"/>
             </a:pPr>
             <a:r>
               <a:t>Weight graph structure and motifs vs DFA</a:t>
@@ -4017,8 +4017,8 @@
         </p:blipFill>
         <p:spPr>
           <a:xfrm>
-            <a:off x="3567136" y="868680"/>
-            <a:ext cx="5057422" cy="5852160"/>
+            <a:off x="1388195" y="822960"/>
+            <a:ext cx="6367608" cy="4166235"/>
           </a:xfrm>
           <a:prstGeom prst="rect">
             <a:avLst/>
@@ -4051,8 +4051,8 @@
         </p:nvSpPr>
         <p:spPr>
           <a:xfrm>
-            <a:off x="182880" y="182880"/>
-            <a:ext cx="11825935" cy="640080"/>
+            <a:off x="182880" y="154305"/>
+            <a:ext cx="8778240" cy="617220"/>
           </a:xfrm>
           <a:prstGeom prst="rect">
             <a:avLst/>
@@ -4066,7 +4066,7 @@
           <a:lstStyle/>
           <a:p>
             <a:pPr>
-              <a:defRPr sz="2400" b="1"/>
+              <a:defRPr sz="1800" b="1"/>
             </a:pPr>
             <a:r>
               <a:t>Demo vocabulary and training stream</a:t>
@@ -4090,8 +4090,8 @@
         </p:blipFill>
         <p:spPr>
           <a:xfrm>
-            <a:off x="182880" y="1897682"/>
-            <a:ext cx="11825935" cy="3794154"/>
+            <a:off x="182880" y="1497901"/>
+            <a:ext cx="8778240" cy="2816352"/>
           </a:xfrm>
           <a:prstGeom prst="rect">
             <a:avLst/>
@@ -4124,8 +4124,8 @@
         </p:nvSpPr>
         <p:spPr>
           <a:xfrm>
-            <a:off x="182880" y="182880"/>
-            <a:ext cx="11825935" cy="640080"/>
+            <a:off x="182880" y="154305"/>
+            <a:ext cx="8778240" cy="617220"/>
           </a:xfrm>
           <a:prstGeom prst="rect">
             <a:avLst/>
@@ -4139,7 +4139,7 @@
           <a:lstStyle/>
           <a:p>
             <a:pPr>
-              <a:defRPr sz="2400" b="1"/>
+              <a:defRPr sz="1800" b="1"/>
             </a:pPr>
             <a:r>
               <a:t>Learning curve and generation</a:t>
@@ -4163,8 +4163,8 @@
         </p:blipFill>
         <p:spPr>
           <a:xfrm>
-            <a:off x="182880" y="2014956"/>
-            <a:ext cx="11825935" cy="3559606"/>
+            <a:off x="182880" y="1584952"/>
+            <a:ext cx="8778240" cy="2642250"/>
           </a:xfrm>
           <a:prstGeom prst="rect">
             <a:avLst/>
@@ -4197,8 +4197,8 @@
         </p:nvSpPr>
         <p:spPr>
           <a:xfrm>
-            <a:off x="182880" y="182880"/>
-            <a:ext cx="11825935" cy="640080"/>
+            <a:off x="182880" y="154305"/>
+            <a:ext cx="8778240" cy="617220"/>
           </a:xfrm>
           <a:prstGeom prst="rect">
             <a:avLst/>
@@ -4212,7 +4212,7 @@
           <a:lstStyle/>
           <a:p>
             <a:pPr>
-              <a:defRPr sz="2400" b="1"/>
+              <a:defRPr sz="1800" b="1"/>
             </a:pPr>
             <a:r>
               <a:t>Next-character probabilities</a:t>
@@ -4236,8 +4236,8 @@
         </p:blipFill>
         <p:spPr>
           <a:xfrm>
-            <a:off x="182880" y="920635"/>
-            <a:ext cx="11825935" cy="5748249"/>
+            <a:off x="286379" y="822960"/>
+            <a:ext cx="8571240" cy="4166234"/>
           </a:xfrm>
           <a:prstGeom prst="rect">
             <a:avLst/>
@@ -4270,8 +4270,8 @@
         </p:nvSpPr>
         <p:spPr>
           <a:xfrm>
-            <a:off x="182880" y="182880"/>
-            <a:ext cx="11825935" cy="640080"/>
+            <a:off x="182880" y="154305"/>
+            <a:ext cx="8778240" cy="617220"/>
           </a:xfrm>
           <a:prstGeom prst="rect">
             <a:avLst/>
@@ -4285,7 +4285,7 @@
           <a:lstStyle/>
           <a:p>
             <a:pPr>
-              <a:defRPr sz="2400" b="1"/>
+              <a:defRPr sz="1800" b="1"/>
             </a:pPr>
             <a:r>
               <a:t>Activation heatmap</a:t>
@@ -4309,8 +4309,8 @@
         </p:blipFill>
         <p:spPr>
           <a:xfrm>
-            <a:off x="1760914" y="868680"/>
-            <a:ext cx="8669866" cy="5852160"/>
+            <a:off x="1485900" y="822960"/>
+            <a:ext cx="6172200" cy="4166235"/>
           </a:xfrm>
           <a:prstGeom prst="rect">
             <a:avLst/>
@@ -4343,8 +4343,8 @@
         </p:nvSpPr>
         <p:spPr>
           <a:xfrm>
-            <a:off x="182880" y="182880"/>
-            <a:ext cx="11825935" cy="640080"/>
+            <a:off x="182880" y="154305"/>
+            <a:ext cx="8778240" cy="617220"/>
           </a:xfrm>
           <a:prstGeom prst="rect">
             <a:avLst/>
@@ -4358,7 +4358,7 @@
           <a:lstStyle/>
           <a:p>
             <a:pPr>
-              <a:defRPr sz="2400" b="1"/>
+              <a:defRPr sz="1800" b="1"/>
             </a:pPr>
             <a:r>
               <a:t>Activations clustered by prefix</a:t>
@@ -4382,8 +4382,8 @@
         </p:blipFill>
         <p:spPr>
           <a:xfrm>
-            <a:off x="182880" y="1293574"/>
-            <a:ext cx="11825935" cy="5002370"/>
+            <a:off x="182880" y="1049479"/>
+            <a:ext cx="8778240" cy="3713195"/>
           </a:xfrm>
           <a:prstGeom prst="rect">
             <a:avLst/>
@@ -4416,8 +4416,8 @@
         </p:nvSpPr>
         <p:spPr>
           <a:xfrm>
-            <a:off x="182880" y="182880"/>
-            <a:ext cx="11825935" cy="640080"/>
+            <a:off x="182880" y="154305"/>
+            <a:ext cx="8778240" cy="617220"/>
           </a:xfrm>
           <a:prstGeom prst="rect">
             <a:avLst/>
@@ -4431,7 +4431,7 @@
           <a:lstStyle/>
           <a:p>
             <a:pPr>
-              <a:defRPr sz="2400" b="1"/>
+              <a:defRPr sz="1800" b="1"/>
             </a:pPr>
             <a:r>
               <a:t>Hidden-state correlation</a:t>
@@ -4455,8 +4455,8 @@
         </p:blipFill>
         <p:spPr>
           <a:xfrm>
-            <a:off x="2245742" y="868680"/>
-            <a:ext cx="7700210" cy="5852160"/>
+            <a:off x="1831055" y="822960"/>
+            <a:ext cx="5481888" cy="4166235"/>
           </a:xfrm>
           <a:prstGeom prst="rect">
             <a:avLst/>
@@ -4489,8 +4489,8 @@
         </p:nvSpPr>
         <p:spPr>
           <a:xfrm>
-            <a:off x="182880" y="182880"/>
-            <a:ext cx="11825935" cy="640080"/>
+            <a:off x="182880" y="154305"/>
+            <a:ext cx="8778240" cy="617220"/>
           </a:xfrm>
           <a:prstGeom prst="rect">
             <a:avLst/>
@@ -4504,7 +4504,7 @@
           <a:lstStyle/>
           <a:p>
             <a:pPr>
-              <a:defRPr sz="2400" b="1"/>
+              <a:defRPr sz="1800" b="1"/>
             </a:pPr>
             <a:r>
               <a:t>DFA PCA geometry and feature separation</a:t>
@@ -4528,8 +4528,8 @@
         </p:blipFill>
         <p:spPr>
           <a:xfrm>
-            <a:off x="3068868" y="868680"/>
-            <a:ext cx="6053958" cy="5852160"/>
+            <a:off x="2417050" y="822960"/>
+            <a:ext cx="4309898" cy="4166235"/>
           </a:xfrm>
           <a:prstGeom prst="rect">
             <a:avLst/>

--- a/paper/slides/paper_figures.pptx
+++ b/paper/slides/paper_figures.pptx
@@ -4017,8 +4017,8 @@
         </p:blipFill>
         <p:spPr>
           <a:xfrm>
-            <a:off x="1388195" y="822960"/>
-            <a:ext cx="6367608" cy="4166235"/>
+            <a:off x="3268888" y="822960"/>
+            <a:ext cx="2606223" cy="4166235"/>
           </a:xfrm>
           <a:prstGeom prst="rect">
             <a:avLst/>
@@ -4236,8 +4236,8 @@
         </p:blipFill>
         <p:spPr>
           <a:xfrm>
-            <a:off x="286379" y="822960"/>
-            <a:ext cx="8571240" cy="4166234"/>
+            <a:off x="182880" y="1907552"/>
+            <a:ext cx="8778240" cy="1997049"/>
           </a:xfrm>
           <a:prstGeom prst="rect">
             <a:avLst/>
@@ -4309,8 +4309,8 @@
         </p:blipFill>
         <p:spPr>
           <a:xfrm>
-            <a:off x="1485900" y="822960"/>
-            <a:ext cx="6172200" cy="4166235"/>
+            <a:off x="2043944" y="822960"/>
+            <a:ext cx="5056110" cy="4166235"/>
           </a:xfrm>
           <a:prstGeom prst="rect">
             <a:avLst/>
@@ -4382,8 +4382,8 @@
         </p:blipFill>
         <p:spPr>
           <a:xfrm>
-            <a:off x="182880" y="1049479"/>
-            <a:ext cx="8778240" cy="3713195"/>
+            <a:off x="487455" y="822960"/>
+            <a:ext cx="8169088" cy="4166235"/>
           </a:xfrm>
           <a:prstGeom prst="rect">
             <a:avLst/>
@@ -4455,8 +4455,8 @@
         </p:blipFill>
         <p:spPr>
           <a:xfrm>
-            <a:off x="1831055" y="822960"/>
-            <a:ext cx="5481888" cy="4166235"/>
+            <a:off x="2559326" y="822960"/>
+            <a:ext cx="4025347" cy="4166235"/>
           </a:xfrm>
           <a:prstGeom prst="rect">
             <a:avLst/>
